--- a/textbook/ppt/chapter05_ppt.pptx
+++ b/textbook/ppt/chapter05_ppt.pptx
@@ -7,6 +7,12 @@
   <p:sldIdLst>
     <p:sldId id="256" r:id="rId7"/>
     <p:sldId id="257" r:id="rId8"/>
+    <p:sldId id="258" r:id="rId9"/>
+    <p:sldId id="259" r:id="rId10"/>
+    <p:sldId id="260" r:id="rId11"/>
+    <p:sldId id="261" r:id="rId12"/>
+    <p:sldId id="262" r:id="rId13"/>
+    <p:sldId id="263" r:id="rId14"/>
   </p:sldIdLst>
   <p:sldSz cx="12188952" cy="6858000" type="screen4x3"/>
   <p:notesSz cx="6858000" cy="9144000"/>
@@ -3229,6 +3235,632 @@
             <a:r>
               <a:rPr sz="1800"/>
               <a:t>• 蛇形矩阵的基本概念与应用</a:t>
+            </a:r>
+          </a:p>
+        </p:txBody>
+      </p:sp>
+    </p:spTree>
+  </p:cSld>
+  <p:clrMapOvr>
+    <a:masterClrMapping/>
+  </p:clrMapOvr>
+</p:sld>
+</file>
+
+<file path=ppt/slides/slide3.xml><?xml version="1.0" encoding="utf-8"?>
+<p:sld xmlns:a="http://schemas.openxmlformats.org/drawingml/2006/main" xmlns:p="http://schemas.openxmlformats.org/presentationml/2006/main" xmlns:r="http://schemas.openxmlformats.org/officeDocument/2006/relationships">
+  <p:cSld>
+    <p:spTree>
+      <p:nvGrpSpPr>
+        <p:cNvPr id="1" name=""/>
+        <p:cNvGrpSpPr/>
+        <p:nvPr/>
+      </p:nvGrpSpPr>
+      <p:grpSpPr/>
+      <p:sp>
+        <p:nvSpPr>
+          <p:cNvPr id="2" name="TextBox 1"/>
+          <p:cNvSpPr txBox="1"/>
+          <p:nvPr/>
+        </p:nvSpPr>
+        <p:spPr>
+          <a:xfrm>
+            <a:off x="914400" y="457200"/>
+            <a:ext cx="10058400" cy="914400"/>
+          </a:xfrm>
+          <a:prstGeom prst="rect">
+            <a:avLst/>
+          </a:prstGeom>
+          <a:noFill/>
+        </p:spPr>
+        <p:txBody>
+          <a:bodyPr wrap="none">
+            <a:spAutoFit/>
+          </a:bodyPr>
+          <a:lstStyle/>
+          <a:p>
+            <a:r>
+              <a:rPr sz="2800" b="1">
+                <a:solidFill>
+                  <a:srgbClr val="8B0000"/>
+                </a:solidFill>
+              </a:rPr>
+              <a:t>本章概览</a:t>
+            </a:r>
+          </a:p>
+        </p:txBody>
+      </p:sp>
+      <p:sp>
+        <p:nvSpPr>
+          <p:cNvPr id="3" name="TextBox 2"/>
+          <p:cNvSpPr txBox="1"/>
+          <p:nvPr/>
+        </p:nvSpPr>
+        <p:spPr>
+          <a:xfrm>
+            <a:off x="914400" y="1371600"/>
+            <a:ext cx="10058400" cy="5029200"/>
+          </a:xfrm>
+          <a:prstGeom prst="rect">
+            <a:avLst/>
+          </a:prstGeom>
+          <a:noFill/>
+        </p:spPr>
+        <p:txBody>
+          <a:bodyPr wrap="none">
+            <a:spAutoFit/>
+          </a:bodyPr>
+          <a:lstStyle/>
+          <a:p/>
+          <a:p>
+            <a:r>
+              <a:rPr sz="1600">
+                <a:solidFill>
+                  <a:srgbClr val="000000"/>
+                </a:solidFill>
+              </a:rPr>
+              <a:t>二维数组 = 矩阵 = 行×列的格子</a:t>
+            </a:r>
+          </a:p>
+          <a:p>
+            <a:r>
+              <a:rPr sz="1600">
+                <a:solidFill>
+                  <a:srgbClr val="000000"/>
+                </a:solidFill>
+              </a:rPr>
+              <a:t>a[i][j] 访问第i行第j列</a:t>
+            </a:r>
+          </a:p>
+          <a:p>
+            <a:r>
+              <a:rPr sz="1600">
+                <a:solidFill>
+                  <a:srgbClr val="000000"/>
+                </a:solidFill>
+              </a:rPr>
+              <a:t>矩阵遍历：双重循环</a:t>
+            </a:r>
+          </a:p>
+          <a:p>
+            <a:r>
+              <a:rPr sz="1600">
+                <a:solidFill>
+                  <a:srgbClr val="000000"/>
+                </a:solidFill>
+              </a:rPr>
+              <a:t>方向数组：上下左右移动</a:t>
+            </a:r>
+          </a:p>
+        </p:txBody>
+      </p:sp>
+    </p:spTree>
+  </p:cSld>
+  <p:clrMapOvr>
+    <a:masterClrMapping/>
+  </p:clrMapOvr>
+</p:sld>
+</file>
+
+<file path=ppt/slides/slide4.xml><?xml version="1.0" encoding="utf-8"?>
+<p:sld xmlns:a="http://schemas.openxmlformats.org/drawingml/2006/main" xmlns:p="http://schemas.openxmlformats.org/presentationml/2006/main" xmlns:r="http://schemas.openxmlformats.org/officeDocument/2006/relationships">
+  <p:cSld>
+    <p:spTree>
+      <p:nvGrpSpPr>
+        <p:cNvPr id="1" name=""/>
+        <p:cNvGrpSpPr/>
+        <p:nvPr/>
+      </p:nvGrpSpPr>
+      <p:grpSpPr/>
+      <p:sp>
+        <p:nvSpPr>
+          <p:cNvPr id="2" name="TextBox 1"/>
+          <p:cNvSpPr txBox="1"/>
+          <p:nvPr/>
+        </p:nvSpPr>
+        <p:spPr>
+          <a:xfrm>
+            <a:off x="914400" y="457200"/>
+            <a:ext cx="10058400" cy="914400"/>
+          </a:xfrm>
+          <a:prstGeom prst="rect">
+            <a:avLst/>
+          </a:prstGeom>
+          <a:noFill/>
+        </p:spPr>
+        <p:txBody>
+          <a:bodyPr wrap="none">
+            <a:spAutoFit/>
+          </a:bodyPr>
+          <a:lstStyle/>
+          <a:p>
+            <a:r>
+              <a:rPr sz="2800" b="1">
+                <a:solidFill>
+                  <a:srgbClr val="8B0000"/>
+                </a:solidFill>
+              </a:rPr>
+              <a:t>C++ 代码示例</a:t>
+            </a:r>
+          </a:p>
+        </p:txBody>
+      </p:sp>
+      <p:sp>
+        <p:nvSpPr>
+          <p:cNvPr id="3" name="TextBox 2"/>
+          <p:cNvSpPr txBox="1"/>
+          <p:nvPr/>
+        </p:nvSpPr>
+        <p:spPr>
+          <a:xfrm>
+            <a:off x="914400" y="1371600"/>
+            <a:ext cx="10058400" cy="5029200"/>
+          </a:xfrm>
+          <a:prstGeom prst="rect">
+            <a:avLst/>
+          </a:prstGeom>
+          <a:noFill/>
+        </p:spPr>
+        <p:txBody>
+          <a:bodyPr wrap="none">
+            <a:spAutoFit/>
+          </a:bodyPr>
+          <a:lstStyle/>
+          <a:p/>
+          <a:p>
+            <a:r>
+              <a:rPr sz="1400">
+                <a:solidFill>
+                  <a:srgbClr val="000000"/>
+                </a:solidFill>
+              </a:rPr>
+              <a:t>int a[12][12];
+for (int i = 0; i &lt; 12; i++)
+  for (int j = 0; j &lt; 12; j++)
+    cin &gt;&gt; a[i][j];</a:t>
+            </a:r>
+          </a:p>
+        </p:txBody>
+      </p:sp>
+    </p:spTree>
+  </p:cSld>
+  <p:clrMapOvr>
+    <a:masterClrMapping/>
+  </p:clrMapOvr>
+</p:sld>
+</file>
+
+<file path=ppt/slides/slide5.xml><?xml version="1.0" encoding="utf-8"?>
+<p:sld xmlns:a="http://schemas.openxmlformats.org/drawingml/2006/main" xmlns:p="http://schemas.openxmlformats.org/presentationml/2006/main" xmlns:r="http://schemas.openxmlformats.org/officeDocument/2006/relationships">
+  <p:cSld>
+    <p:spTree>
+      <p:nvGrpSpPr>
+        <p:cNvPr id="1" name=""/>
+        <p:cNvGrpSpPr/>
+        <p:nvPr/>
+      </p:nvGrpSpPr>
+      <p:grpSpPr/>
+      <p:sp>
+        <p:nvSpPr>
+          <p:cNvPr id="2" name="TextBox 1"/>
+          <p:cNvSpPr txBox="1"/>
+          <p:nvPr/>
+        </p:nvSpPr>
+        <p:spPr>
+          <a:xfrm>
+            <a:off x="914400" y="457200"/>
+            <a:ext cx="10058400" cy="914400"/>
+          </a:xfrm>
+          <a:prstGeom prst="rect">
+            <a:avLst/>
+          </a:prstGeom>
+          <a:noFill/>
+        </p:spPr>
+        <p:txBody>
+          <a:bodyPr wrap="none">
+            <a:spAutoFit/>
+          </a:bodyPr>
+          <a:lstStyle/>
+          <a:p>
+            <a:r>
+              <a:rPr sz="2800" b="1">
+                <a:solidFill>
+                  <a:srgbClr val="8B0000"/>
+                </a:solidFill>
+              </a:rPr>
+              <a:t>Python 代码示例</a:t>
+            </a:r>
+          </a:p>
+        </p:txBody>
+      </p:sp>
+      <p:sp>
+        <p:nvSpPr>
+          <p:cNvPr id="3" name="TextBox 2"/>
+          <p:cNvSpPr txBox="1"/>
+          <p:nvPr/>
+        </p:nvSpPr>
+        <p:spPr>
+          <a:xfrm>
+            <a:off x="914400" y="1371600"/>
+            <a:ext cx="10058400" cy="5029200"/>
+          </a:xfrm>
+          <a:prstGeom prst="rect">
+            <a:avLst/>
+          </a:prstGeom>
+          <a:noFill/>
+        </p:spPr>
+        <p:txBody>
+          <a:bodyPr wrap="none">
+            <a:spAutoFit/>
+          </a:bodyPr>
+          <a:lstStyle/>
+          <a:p/>
+          <a:p>
+            <a:r>
+              <a:rPr sz="1400">
+                <a:solidFill>
+                  <a:srgbClr val="000000"/>
+                </a:solidFill>
+              </a:rPr>
+              <a:t>a = []
+for i in range(12):
+    row = list(map(float, input().split()))
+    a.append(row)</a:t>
+            </a:r>
+          </a:p>
+        </p:txBody>
+      </p:sp>
+    </p:spTree>
+  </p:cSld>
+  <p:clrMapOvr>
+    <a:masterClrMapping/>
+  </p:clrMapOvr>
+</p:sld>
+</file>
+
+<file path=ppt/slides/slide6.xml><?xml version="1.0" encoding="utf-8"?>
+<p:sld xmlns:a="http://schemas.openxmlformats.org/drawingml/2006/main" xmlns:p="http://schemas.openxmlformats.org/presentationml/2006/main" xmlns:r="http://schemas.openxmlformats.org/officeDocument/2006/relationships">
+  <p:cSld>
+    <p:spTree>
+      <p:nvGrpSpPr>
+        <p:cNvPr id="1" name=""/>
+        <p:cNvGrpSpPr/>
+        <p:nvPr/>
+      </p:nvGrpSpPr>
+      <p:grpSpPr/>
+      <p:sp>
+        <p:nvSpPr>
+          <p:cNvPr id="2" name="TextBox 1"/>
+          <p:cNvSpPr txBox="1"/>
+          <p:nvPr/>
+        </p:nvSpPr>
+        <p:spPr>
+          <a:xfrm>
+            <a:off x="914400" y="457200"/>
+            <a:ext cx="10058400" cy="914400"/>
+          </a:xfrm>
+          <a:prstGeom prst="rect">
+            <a:avLst/>
+          </a:prstGeom>
+          <a:noFill/>
+        </p:spPr>
+        <p:txBody>
+          <a:bodyPr wrap="none">
+            <a:spAutoFit/>
+          </a:bodyPr>
+          <a:lstStyle/>
+          <a:p>
+            <a:r>
+              <a:rPr sz="2800" b="1">
+                <a:solidFill>
+                  <a:srgbClr val="8B0000"/>
+                </a:solidFill>
+              </a:rPr>
+              <a:t>常见错误</a:t>
+            </a:r>
+          </a:p>
+        </p:txBody>
+      </p:sp>
+      <p:sp>
+        <p:nvSpPr>
+          <p:cNvPr id="3" name="TextBox 2"/>
+          <p:cNvSpPr txBox="1"/>
+          <p:nvPr/>
+        </p:nvSpPr>
+        <p:spPr>
+          <a:xfrm>
+            <a:off x="914400" y="1371600"/>
+            <a:ext cx="10058400" cy="5029200"/>
+          </a:xfrm>
+          <a:prstGeom prst="rect">
+            <a:avLst/>
+          </a:prstGeom>
+          <a:noFill/>
+        </p:spPr>
+        <p:txBody>
+          <a:bodyPr wrap="none">
+            <a:spAutoFit/>
+          </a:bodyPr>
+          <a:lstStyle/>
+          <a:p/>
+          <a:p>
+            <a:r>
+              <a:rPr sz="1600">
+                <a:solidFill>
+                  <a:srgbClr val="000000"/>
+                </a:solidFill>
+              </a:rPr>
+              <a:t>行号和列号搞混</a:t>
+            </a:r>
+          </a:p>
+          <a:p>
+            <a:r>
+              <a:rPr sz="1600">
+                <a:solidFill>
+                  <a:srgbClr val="000000"/>
+                </a:solidFill>
+              </a:rPr>
+              <a:t>矩阵下标从0还是1开始</a:t>
+            </a:r>
+          </a:p>
+          <a:p>
+            <a:r>
+              <a:rPr sz="1600">
+                <a:solidFill>
+                  <a:srgbClr val="000000"/>
+                </a:solidFill>
+              </a:rPr>
+              <a:t>行末空格问题</a:t>
+            </a:r>
+          </a:p>
+          <a:p>
+            <a:r>
+              <a:rPr sz="1600">
+                <a:solidFill>
+                  <a:srgbClr val="000000"/>
+                </a:solidFill>
+              </a:rPr>
+              <a:t>大矩阵初始化慢</a:t>
+            </a:r>
+          </a:p>
+        </p:txBody>
+      </p:sp>
+    </p:spTree>
+  </p:cSld>
+  <p:clrMapOvr>
+    <a:masterClrMapping/>
+  </p:clrMapOvr>
+</p:sld>
+</file>
+
+<file path=ppt/slides/slide7.xml><?xml version="1.0" encoding="utf-8"?>
+<p:sld xmlns:a="http://schemas.openxmlformats.org/drawingml/2006/main" xmlns:p="http://schemas.openxmlformats.org/presentationml/2006/main" xmlns:r="http://schemas.openxmlformats.org/officeDocument/2006/relationships">
+  <p:cSld>
+    <p:spTree>
+      <p:nvGrpSpPr>
+        <p:cNvPr id="1" name=""/>
+        <p:cNvGrpSpPr/>
+        <p:nvPr/>
+      </p:nvGrpSpPr>
+      <p:grpSpPr/>
+      <p:sp>
+        <p:nvSpPr>
+          <p:cNvPr id="2" name="TextBox 1"/>
+          <p:cNvSpPr txBox="1"/>
+          <p:nvPr/>
+        </p:nvSpPr>
+        <p:spPr>
+          <a:xfrm>
+            <a:off x="914400" y="457200"/>
+            <a:ext cx="10058400" cy="914400"/>
+          </a:xfrm>
+          <a:prstGeom prst="rect">
+            <a:avLst/>
+          </a:prstGeom>
+          <a:noFill/>
+        </p:spPr>
+        <p:txBody>
+          <a:bodyPr wrap="none">
+            <a:spAutoFit/>
+          </a:bodyPr>
+          <a:lstStyle/>
+          <a:p>
+            <a:r>
+              <a:rPr sz="2800" b="1">
+                <a:solidFill>
+                  <a:srgbClr val="8B0000"/>
+                </a:solidFill>
+              </a:rPr>
+              <a:t>练习题目</a:t>
+            </a:r>
+          </a:p>
+        </p:txBody>
+      </p:sp>
+      <p:sp>
+        <p:nvSpPr>
+          <p:cNvPr id="3" name="TextBox 2"/>
+          <p:cNvSpPr txBox="1"/>
+          <p:nvPr/>
+        </p:nvSpPr>
+        <p:spPr>
+          <a:xfrm>
+            <a:off x="914400" y="1371600"/>
+            <a:ext cx="10058400" cy="5029200"/>
+          </a:xfrm>
+          <a:prstGeom prst="rect">
+            <a:avLst/>
+          </a:prstGeom>
+          <a:noFill/>
+        </p:spPr>
+        <p:txBody>
+          <a:bodyPr wrap="none">
+            <a:spAutoFit/>
+          </a:bodyPr>
+          <a:lstStyle/>
+          <a:p/>
+          <a:p>
+            <a:r>
+              <a:rPr sz="1600">
+                <a:solidFill>
+                  <a:srgbClr val="000000"/>
+                </a:solidFill>
+              </a:rPr>
+              <a:t>JD055 上方剑域</a:t>
+            </a:r>
+          </a:p>
+          <a:p>
+            <a:r>
+              <a:rPr sz="1600">
+                <a:solidFill>
+                  <a:srgbClr val="000000"/>
+                </a:solidFill>
+              </a:rPr>
+              <a:t>JD063 方圆初阵</a:t>
+            </a:r>
+          </a:p>
+          <a:p>
+            <a:r>
+              <a:rPr sz="1600">
+                <a:solidFill>
+                  <a:srgbClr val="000000"/>
+                </a:solidFill>
+              </a:rPr>
+              <a:t>JD066 蛇形剑阵</a:t>
+            </a:r>
+          </a:p>
+        </p:txBody>
+      </p:sp>
+    </p:spTree>
+  </p:cSld>
+  <p:clrMapOvr>
+    <a:masterClrMapping/>
+  </p:clrMapOvr>
+</p:sld>
+</file>
+
+<file path=ppt/slides/slide8.xml><?xml version="1.0" encoding="utf-8"?>
+<p:sld xmlns:a="http://schemas.openxmlformats.org/drawingml/2006/main" xmlns:p="http://schemas.openxmlformats.org/presentationml/2006/main" xmlns:r="http://schemas.openxmlformats.org/officeDocument/2006/relationships">
+  <p:cSld>
+    <p:spTree>
+      <p:nvGrpSpPr>
+        <p:cNvPr id="1" name=""/>
+        <p:cNvGrpSpPr/>
+        <p:nvPr/>
+      </p:nvGrpSpPr>
+      <p:grpSpPr/>
+      <p:sp>
+        <p:nvSpPr>
+          <p:cNvPr id="2" name="TextBox 1"/>
+          <p:cNvSpPr txBox="1"/>
+          <p:nvPr/>
+        </p:nvSpPr>
+        <p:spPr>
+          <a:xfrm>
+            <a:off x="914400" y="457200"/>
+            <a:ext cx="10058400" cy="914400"/>
+          </a:xfrm>
+          <a:prstGeom prst="rect">
+            <a:avLst/>
+          </a:prstGeom>
+          <a:noFill/>
+        </p:spPr>
+        <p:txBody>
+          <a:bodyPr wrap="none">
+            <a:spAutoFit/>
+          </a:bodyPr>
+          <a:lstStyle/>
+          <a:p>
+            <a:r>
+              <a:rPr sz="2800" b="1">
+                <a:solidFill>
+                  <a:srgbClr val="8B0000"/>
+                </a:solidFill>
+              </a:rPr>
+              <a:t>本章小结</a:t>
+            </a:r>
+          </a:p>
+        </p:txBody>
+      </p:sp>
+      <p:sp>
+        <p:nvSpPr>
+          <p:cNvPr id="3" name="TextBox 2"/>
+          <p:cNvSpPr txBox="1"/>
+          <p:nvPr/>
+        </p:nvSpPr>
+        <p:spPr>
+          <a:xfrm>
+            <a:off x="914400" y="1371600"/>
+            <a:ext cx="10058400" cy="5029200"/>
+          </a:xfrm>
+          <a:prstGeom prst="rect">
+            <a:avLst/>
+          </a:prstGeom>
+          <a:noFill/>
+        </p:spPr>
+        <p:txBody>
+          <a:bodyPr wrap="none">
+            <a:spAutoFit/>
+          </a:bodyPr>
+          <a:lstStyle/>
+          <a:p/>
+          <a:p>
+            <a:r>
+              <a:rPr sz="1600">
+                <a:solidFill>
+                  <a:srgbClr val="000000"/>
+                </a:solidFill>
+              </a:rPr>
+              <a:t>掌握核心概念</a:t>
+            </a:r>
+          </a:p>
+          <a:p>
+            <a:r>
+              <a:rPr sz="1600">
+                <a:solidFill>
+                  <a:srgbClr val="000000"/>
+                </a:solidFill>
+              </a:rPr>
+              <a:t>多做练习</a:t>
+            </a:r>
+          </a:p>
+          <a:p>
+            <a:r>
+              <a:rPr sz="1600">
+                <a:solidFill>
+                  <a:srgbClr val="000000"/>
+                </a:solidFill>
+              </a:rPr>
+              <a:t>注意边界条件</a:t>
+            </a:r>
+          </a:p>
+          <a:p>
+            <a:r>
+              <a:rPr sz="1600">
+                <a:solidFill>
+                  <a:srgbClr val="000000"/>
+                </a:solidFill>
+              </a:rPr>
+              <a:t>理解算法思想而非死记代码</a:t>
             </a:r>
           </a:p>
         </p:txBody>

--- a/textbook/ppt/chapter05_ppt.pptx
+++ b/textbook/ppt/chapter05_ppt.pptx
@@ -12,7 +12,6 @@
     <p:sldId id="260" r:id="rId11"/>
     <p:sldId id="261" r:id="rId12"/>
     <p:sldId id="262" r:id="rId13"/>
-    <p:sldId id="263" r:id="rId14"/>
   </p:sldIdLst>
   <p:sldSz cx="12188952" cy="6858000" type="screen4x3"/>
   <p:notesSz cx="6858000" cy="9144000"/>
@@ -3124,18 +3123,7 @@
                   <a:srgbClr val="8B0000"/>
                 </a:solidFill>
               </a:rPr>
-              <a:t>第5章 十二宫剑阵</a:t>
-            </a:r>
-          </a:p>
-          <a:p>
-            <a:pPr algn="ctr"/>
-            <a:r>
-              <a:rPr sz="2400">
-                <a:solidFill>
-                  <a:srgbClr val="6B5D4D"/>
-                </a:solidFill>
-              </a:rPr>
-              <a:t>二维数组</a:t>
+              <a:t>第5章</a:t>
             </a:r>
           </a:p>
         </p:txBody>
@@ -3166,8 +3154,8 @@
         </p:nvSpPr>
         <p:spPr>
           <a:xfrm>
-            <a:off x="914400" y="457200"/>
-            <a:ext cx="10058400" cy="914400"/>
+            <a:off x="457200" y="274320"/>
+            <a:ext cx="10972800" cy="731520"/>
           </a:xfrm>
           <a:prstGeom prst="rect">
             <a:avLst/>
@@ -3181,7 +3169,7 @@
           <a:lstStyle/>
           <a:p>
             <a:r>
-              <a:rPr sz="2800" b="1">
+              <a:rPr sz="2400" b="1">
                 <a:solidFill>
                   <a:srgbClr val="8B0000"/>
                 </a:solidFill>
@@ -3199,8 +3187,8 @@
         </p:nvSpPr>
         <p:spPr>
           <a:xfrm>
-            <a:off x="914400" y="1371600"/>
-            <a:ext cx="10058400" cy="4572000"/>
+            <a:off x="457200" y="1097280"/>
+            <a:ext cx="10972800" cy="5029200"/>
           </a:xfrm>
           <a:prstGeom prst="rect">
             <a:avLst/>
@@ -3215,26 +3203,42 @@
           <a:p/>
           <a:p>
             <a:r>
-              <a:rPr sz="1800"/>
-              <a:t>• 二维数组声明的基本概念与应用</a:t>
-            </a:r>
-          </a:p>
-          <a:p>
-            <a:r>
-              <a:rPr sz="1800"/>
-              <a:t>• 矩阵遍历的基本概念与应用</a:t>
-            </a:r>
-          </a:p>
-          <a:p>
-            <a:r>
-              <a:rPr sz="1800"/>
-              <a:t>• 方向数组的基本概念与应用</a:t>
-            </a:r>
-          </a:p>
-          <a:p>
-            <a:r>
-              <a:rPr sz="1800"/>
-              <a:t>• 蛇形矩阵的基本概念与应用</a:t>
+              <a:rPr sz="1400">
+                <a:solidFill>
+                  <a:srgbClr val="000000"/>
+                </a:solidFill>
+              </a:rPr>
+              <a:t>二维数组 = 矩阵 = 行×列的格子</a:t>
+            </a:r>
+          </a:p>
+          <a:p>
+            <a:r>
+              <a:rPr sz="1400">
+                <a:solidFill>
+                  <a:srgbClr val="000000"/>
+                </a:solidFill>
+              </a:rPr>
+              <a:t>a[i][j]：第 i 行第 j 列（都从0开始）</a:t>
+            </a:r>
+          </a:p>
+          <a:p>
+            <a:r>
+              <a:rPr sz="1400">
+                <a:solidFill>
+                  <a:srgbClr val="000000"/>
+                </a:solidFill>
+              </a:rPr>
+              <a:t>矩阵遍历：双重循环，外层行内层列</a:t>
+            </a:r>
+          </a:p>
+          <a:p>
+            <a:r>
+              <a:rPr sz="1400">
+                <a:solidFill>
+                  <a:srgbClr val="000000"/>
+                </a:solidFill>
+              </a:rPr>
+              <a:t>方向数组：上下左右移动的坐标增量</a:t>
             </a:r>
           </a:p>
         </p:txBody>
@@ -3265,8 +3269,8 @@
         </p:nvSpPr>
         <p:spPr>
           <a:xfrm>
-            <a:off x="914400" y="457200"/>
-            <a:ext cx="10058400" cy="914400"/>
+            <a:off x="457200" y="274320"/>
+            <a:ext cx="10972800" cy="731520"/>
           </a:xfrm>
           <a:prstGeom prst="rect">
             <a:avLst/>
@@ -3280,12 +3284,12 @@
           <a:lstStyle/>
           <a:p>
             <a:r>
-              <a:rPr sz="2800" b="1">
+              <a:rPr sz="2400" b="1">
                 <a:solidFill>
                   <a:srgbClr val="8B0000"/>
                 </a:solidFill>
               </a:rPr>
-              <a:t>本章概览</a:t>
+              <a:t>C++ 代码示例</a:t>
             </a:r>
           </a:p>
         </p:txBody>
@@ -3298,8 +3302,8 @@
         </p:nvSpPr>
         <p:spPr>
           <a:xfrm>
-            <a:off x="914400" y="1371600"/>
-            <a:ext cx="10058400" cy="5029200"/>
+            <a:off x="457200" y="1097280"/>
+            <a:ext cx="10972800" cy="5029200"/>
           </a:xfrm>
           <a:prstGeom prst="rect">
             <a:avLst/>
@@ -3314,42 +3318,18 @@
           <a:p/>
           <a:p>
             <a:r>
-              <a:rPr sz="1600">
+              <a:rPr sz="1200">
                 <a:solidFill>
                   <a:srgbClr val="000000"/>
                 </a:solidFill>
               </a:rPr>
-              <a:t>二维数组 = 矩阵 = 行×列的格子</a:t>
-            </a:r>
-          </a:p>
-          <a:p>
-            <a:r>
-              <a:rPr sz="1600">
-                <a:solidFill>
-                  <a:srgbClr val="000000"/>
-                </a:solidFill>
-              </a:rPr>
-              <a:t>a[i][j] 访问第i行第j列</a:t>
-            </a:r>
-          </a:p>
-          <a:p>
-            <a:r>
-              <a:rPr sz="1600">
-                <a:solidFill>
-                  <a:srgbClr val="000000"/>
-                </a:solidFill>
-              </a:rPr>
-              <a:t>矩阵遍历：双重循环</a:t>
-            </a:r>
-          </a:p>
-          <a:p>
-            <a:r>
-              <a:rPr sz="1600">
-                <a:solidFill>
-                  <a:srgbClr val="000000"/>
-                </a:solidFill>
-              </a:rPr>
-              <a:t>方向数组：上下左右移动</a:t>
+              <a:t>int a[12][12];
+for (int i = 0; i &lt; 12; i++)
+    for (int j = 0; j &lt; 12; j++)
+        cin &gt;&gt; a[i][j];
+// 方向数组
+int dx[] = {0,1,0,-1};
+int dy[] = {1,0,-1,0};</a:t>
             </a:r>
           </a:p>
         </p:txBody>
@@ -3380,8 +3360,8 @@
         </p:nvSpPr>
         <p:spPr>
           <a:xfrm>
-            <a:off x="914400" y="457200"/>
-            <a:ext cx="10058400" cy="914400"/>
+            <a:off x="457200" y="274320"/>
+            <a:ext cx="10972800" cy="731520"/>
           </a:xfrm>
           <a:prstGeom prst="rect">
             <a:avLst/>
@@ -3395,12 +3375,12 @@
           <a:lstStyle/>
           <a:p>
             <a:r>
-              <a:rPr sz="2800" b="1">
+              <a:rPr sz="2400" b="1">
                 <a:solidFill>
                   <a:srgbClr val="8B0000"/>
                 </a:solidFill>
               </a:rPr>
-              <a:t>C++ 代码示例</a:t>
+              <a:t>Python 代码示例</a:t>
             </a:r>
           </a:p>
         </p:txBody>
@@ -3413,8 +3393,8 @@
         </p:nvSpPr>
         <p:spPr>
           <a:xfrm>
-            <a:off x="914400" y="1371600"/>
-            <a:ext cx="10058400" cy="5029200"/>
+            <a:off x="457200" y="1097280"/>
+            <a:ext cx="10972800" cy="5029200"/>
           </a:xfrm>
           <a:prstGeom prst="rect">
             <a:avLst/>
@@ -3429,15 +3409,18 @@
           <a:p/>
           <a:p>
             <a:r>
-              <a:rPr sz="1400">
+              <a:rPr sz="1200">
                 <a:solidFill>
                   <a:srgbClr val="000000"/>
                 </a:solidFill>
               </a:rPr>
-              <a:t>int a[12][12];
-for (int i = 0; i &lt; 12; i++)
-  for (int j = 0; j &lt; 12; j++)
-    cin &gt;&gt; a[i][j];</a:t>
+              <a:t>a = []
+for i in range(12):
+    row = list(map(float, input().split()))
+    a.append(row)
+# 方向数组
+dx = [0, 1, 0, -1]
+dy = [1, 0, -1, 0]</a:t>
             </a:r>
           </a:p>
         </p:txBody>
@@ -3468,8 +3451,8 @@
         </p:nvSpPr>
         <p:spPr>
           <a:xfrm>
-            <a:off x="914400" y="457200"/>
-            <a:ext cx="10058400" cy="914400"/>
+            <a:off x="457200" y="274320"/>
+            <a:ext cx="10972800" cy="731520"/>
           </a:xfrm>
           <a:prstGeom prst="rect">
             <a:avLst/>
@@ -3483,12 +3466,12 @@
           <a:lstStyle/>
           <a:p>
             <a:r>
-              <a:rPr sz="2800" b="1">
+              <a:rPr sz="2400" b="1">
                 <a:solidFill>
                   <a:srgbClr val="8B0000"/>
                 </a:solidFill>
               </a:rPr>
-              <a:t>Python 代码示例</a:t>
+              <a:t>常见错误</a:t>
             </a:r>
           </a:p>
         </p:txBody>
@@ -3501,8 +3484,8 @@
         </p:nvSpPr>
         <p:spPr>
           <a:xfrm>
-            <a:off x="914400" y="1371600"/>
-            <a:ext cx="10058400" cy="5029200"/>
+            <a:off x="457200" y="1097280"/>
+            <a:ext cx="10972800" cy="5029200"/>
           </a:xfrm>
           <a:prstGeom prst="rect">
             <a:avLst/>
@@ -3522,10 +3505,37 @@
                   <a:srgbClr val="000000"/>
                 </a:solidFill>
               </a:rPr>
-              <a:t>a = []
-for i in range(12):
-    row = list(map(float, input().split()))
-    a.append(row)</a:t>
+              <a:t>行号和列号搞混：a[row][col]</a:t>
+            </a:r>
+          </a:p>
+          <a:p>
+            <a:r>
+              <a:rPr sz="1400">
+                <a:solidFill>
+                  <a:srgbClr val="000000"/>
+                </a:solidFill>
+              </a:rPr>
+              <a:t>矩阵下标从0还是1开始？看题目要求</a:t>
+            </a:r>
+          </a:p>
+          <a:p>
+            <a:r>
+              <a:rPr sz="1400">
+                <a:solidFill>
+                  <a:srgbClr val="000000"/>
+                </a:solidFill>
+              </a:rPr>
+              <a:t>行末空格问题：有些OJ要求行末无空格</a:t>
+            </a:r>
+          </a:p>
+          <a:p>
+            <a:r>
+              <a:rPr sz="1400">
+                <a:solidFill>
+                  <a:srgbClr val="000000"/>
+                </a:solidFill>
+              </a:rPr>
+              <a:t>大矩阵初始化慢，考虑用全局数组</a:t>
             </a:r>
           </a:p>
         </p:txBody>
@@ -3556,8 +3566,8 @@
         </p:nvSpPr>
         <p:spPr>
           <a:xfrm>
-            <a:off x="914400" y="457200"/>
-            <a:ext cx="10058400" cy="914400"/>
+            <a:off x="457200" y="274320"/>
+            <a:ext cx="10972800" cy="731520"/>
           </a:xfrm>
           <a:prstGeom prst="rect">
             <a:avLst/>
@@ -3571,12 +3581,12 @@
           <a:lstStyle/>
           <a:p>
             <a:r>
-              <a:rPr sz="2800" b="1">
+              <a:rPr sz="2400" b="1">
                 <a:solidFill>
                   <a:srgbClr val="8B0000"/>
                 </a:solidFill>
               </a:rPr>
-              <a:t>常见错误</a:t>
+              <a:t>练习题目</a:t>
             </a:r>
           </a:p>
         </p:txBody>
@@ -3589,8 +3599,8 @@
         </p:nvSpPr>
         <p:spPr>
           <a:xfrm>
-            <a:off x="914400" y="1371600"/>
-            <a:ext cx="10058400" cy="5029200"/>
+            <a:off x="457200" y="1097280"/>
+            <a:ext cx="10972800" cy="5029200"/>
           </a:xfrm>
           <a:prstGeom prst="rect">
             <a:avLst/>
@@ -3605,42 +3615,32 @@
           <a:p/>
           <a:p>
             <a:r>
-              <a:rPr sz="1600">
+              <a:rPr sz="1400">
                 <a:solidFill>
                   <a:srgbClr val="000000"/>
                 </a:solidFill>
               </a:rPr>
-              <a:t>行号和列号搞混</a:t>
-            </a:r>
-          </a:p>
-          <a:p>
-            <a:r>
-              <a:rPr sz="1600">
+              <a:t>JD055 上方剑域 - 区域求和 (Medium)</a:t>
+            </a:r>
+          </a:p>
+          <a:p>
+            <a:r>
+              <a:rPr sz="1400">
                 <a:solidFill>
                   <a:srgbClr val="000000"/>
                 </a:solidFill>
               </a:rPr>
-              <a:t>矩阵下标从0还是1开始</a:t>
-            </a:r>
-          </a:p>
-          <a:p>
-            <a:r>
-              <a:rPr sz="1600">
+              <a:t>JD063 方圆初阵 - 回字矩阵 (Medium)</a:t>
+            </a:r>
+          </a:p>
+          <a:p>
+            <a:r>
+              <a:rPr sz="1400">
                 <a:solidFill>
                   <a:srgbClr val="000000"/>
                 </a:solidFill>
               </a:rPr>
-              <a:t>行末空格问题</a:t>
-            </a:r>
-          </a:p>
-          <a:p>
-            <a:r>
-              <a:rPr sz="1600">
-                <a:solidFill>
-                  <a:srgbClr val="000000"/>
-                </a:solidFill>
-              </a:rPr>
-              <a:t>大矩阵初始化慢</a:t>
+              <a:t>JD066 蛇形剑阵 - 蛇形遍历 (Hard)</a:t>
             </a:r>
           </a:p>
         </p:txBody>
@@ -3671,8 +3671,8 @@
         </p:nvSpPr>
         <p:spPr>
           <a:xfrm>
-            <a:off x="914400" y="457200"/>
-            <a:ext cx="10058400" cy="914400"/>
+            <a:off x="457200" y="274320"/>
+            <a:ext cx="10972800" cy="731520"/>
           </a:xfrm>
           <a:prstGeom prst="rect">
             <a:avLst/>
@@ -3686,12 +3686,12 @@
           <a:lstStyle/>
           <a:p>
             <a:r>
-              <a:rPr sz="2800" b="1">
+              <a:rPr sz="2400" b="1">
                 <a:solidFill>
                   <a:srgbClr val="8B0000"/>
                 </a:solidFill>
               </a:rPr>
-              <a:t>练习题目</a:t>
+              <a:t>本章小结</a:t>
             </a:r>
           </a:p>
         </p:txBody>
@@ -3704,8 +3704,8 @@
         </p:nvSpPr>
         <p:spPr>
           <a:xfrm>
-            <a:off x="914400" y="1371600"/>
-            <a:ext cx="10058400" cy="5029200"/>
+            <a:off x="457200" y="1097280"/>
+            <a:ext cx="10972800" cy="5029200"/>
           </a:xfrm>
           <a:prstGeom prst="rect">
             <a:avLst/>
@@ -3720,147 +3720,42 @@
           <a:p/>
           <a:p>
             <a:r>
-              <a:rPr sz="1600">
+              <a:rPr sz="1400">
                 <a:solidFill>
                   <a:srgbClr val="000000"/>
                 </a:solidFill>
               </a:rPr>
-              <a:t>JD055 上方剑域</a:t>
-            </a:r>
-          </a:p>
-          <a:p>
-            <a:r>
-              <a:rPr sz="1600">
+              <a:t>本章学习了第5章的核心概念</a:t>
+            </a:r>
+          </a:p>
+          <a:p>
+            <a:r>
+              <a:rPr sz="1400">
                 <a:solidFill>
                   <a:srgbClr val="000000"/>
                 </a:solidFill>
               </a:rPr>
-              <a:t>JD063 方圆初阵</a:t>
-            </a:r>
-          </a:p>
-          <a:p>
-            <a:r>
-              <a:rPr sz="1600">
+              <a:t>多做练习是掌握算法的关键</a:t>
+            </a:r>
+          </a:p>
+          <a:p>
+            <a:r>
+              <a:rPr sz="1400">
                 <a:solidFill>
                   <a:srgbClr val="000000"/>
                 </a:solidFill>
               </a:rPr>
-              <a:t>JD066 蛇形剑阵</a:t>
-            </a:r>
-          </a:p>
-        </p:txBody>
-      </p:sp>
-    </p:spTree>
-  </p:cSld>
-  <p:clrMapOvr>
-    <a:masterClrMapping/>
-  </p:clrMapOvr>
-</p:sld>
-</file>
-
-<file path=ppt/slides/slide8.xml><?xml version="1.0" encoding="utf-8"?>
-<p:sld xmlns:a="http://schemas.openxmlformats.org/drawingml/2006/main" xmlns:p="http://schemas.openxmlformats.org/presentationml/2006/main" xmlns:r="http://schemas.openxmlformats.org/officeDocument/2006/relationships">
-  <p:cSld>
-    <p:spTree>
-      <p:nvGrpSpPr>
-        <p:cNvPr id="1" name=""/>
-        <p:cNvGrpSpPr/>
-        <p:nvPr/>
-      </p:nvGrpSpPr>
-      <p:grpSpPr/>
-      <p:sp>
-        <p:nvSpPr>
-          <p:cNvPr id="2" name="TextBox 1"/>
-          <p:cNvSpPr txBox="1"/>
-          <p:nvPr/>
-        </p:nvSpPr>
-        <p:spPr>
-          <a:xfrm>
-            <a:off x="914400" y="457200"/>
-            <a:ext cx="10058400" cy="914400"/>
-          </a:xfrm>
-          <a:prstGeom prst="rect">
-            <a:avLst/>
-          </a:prstGeom>
-          <a:noFill/>
-        </p:spPr>
-        <p:txBody>
-          <a:bodyPr wrap="none">
-            <a:spAutoFit/>
-          </a:bodyPr>
-          <a:lstStyle/>
-          <a:p>
-            <a:r>
-              <a:rPr sz="2800" b="1">
-                <a:solidFill>
-                  <a:srgbClr val="8B0000"/>
+              <a:t>理解算法思想比死记代码更重要</a:t>
+            </a:r>
+          </a:p>
+          <a:p>
+            <a:r>
+              <a:rPr sz="1400">
+                <a:solidFill>
+                  <a:srgbClr val="000000"/>
                 </a:solidFill>
               </a:rPr>
-              <a:t>本章小结</a:t>
-            </a:r>
-          </a:p>
-        </p:txBody>
-      </p:sp>
-      <p:sp>
-        <p:nvSpPr>
-          <p:cNvPr id="3" name="TextBox 2"/>
-          <p:cNvSpPr txBox="1"/>
-          <p:nvPr/>
-        </p:nvSpPr>
-        <p:spPr>
-          <a:xfrm>
-            <a:off x="914400" y="1371600"/>
-            <a:ext cx="10058400" cy="5029200"/>
-          </a:xfrm>
-          <a:prstGeom prst="rect">
-            <a:avLst/>
-          </a:prstGeom>
-          <a:noFill/>
-        </p:spPr>
-        <p:txBody>
-          <a:bodyPr wrap="none">
-            <a:spAutoFit/>
-          </a:bodyPr>
-          <a:lstStyle/>
-          <a:p/>
-          <a:p>
-            <a:r>
-              <a:rPr sz="1600">
-                <a:solidFill>
-                  <a:srgbClr val="000000"/>
-                </a:solidFill>
-              </a:rPr>
-              <a:t>掌握核心概念</a:t>
-            </a:r>
-          </a:p>
-          <a:p>
-            <a:r>
-              <a:rPr sz="1600">
-                <a:solidFill>
-                  <a:srgbClr val="000000"/>
-                </a:solidFill>
-              </a:rPr>
-              <a:t>多做练习</a:t>
-            </a:r>
-          </a:p>
-          <a:p>
-            <a:r>
-              <a:rPr sz="1600">
-                <a:solidFill>
-                  <a:srgbClr val="000000"/>
-                </a:solidFill>
-              </a:rPr>
-              <a:t>注意边界条件</a:t>
-            </a:r>
-          </a:p>
-          <a:p>
-            <a:r>
-              <a:rPr sz="1600">
-                <a:solidFill>
-                  <a:srgbClr val="000000"/>
-                </a:solidFill>
-              </a:rPr>
-              <a:t>理解算法思想而非死记代码</a:t>
+              <a:t>遇到问题先画图、再想算法、最后写代码</a:t>
             </a:r>
           </a:p>
         </p:txBody>

--- a/textbook/ppt/chapter05_ppt.pptx
+++ b/textbook/ppt/chapter05_ppt.pptx
@@ -12,6 +12,7 @@
     <p:sldId id="260" r:id="rId11"/>
     <p:sldId id="261" r:id="rId12"/>
     <p:sldId id="262" r:id="rId13"/>
+    <p:sldId id="263" r:id="rId14"/>
   </p:sldIdLst>
   <p:sldSz cx="12188952" cy="6858000" type="screen4x3"/>
   <p:notesSz cx="6858000" cy="9144000"/>
@@ -3756,6 +3757,91 @@
                 </a:solidFill>
               </a:rPr>
               <a:t>遇到问题先画图、再想算法、最后写代码</a:t>
+            </a:r>
+          </a:p>
+        </p:txBody>
+      </p:sp>
+    </p:spTree>
+  </p:cSld>
+  <p:clrMapOvr>
+    <a:masterClrMapping/>
+  </p:clrMapOvr>
+</p:sld>
+</file>
+
+<file path=ppt/slides/slide8.xml><?xml version="1.0" encoding="utf-8"?>
+<p:sld xmlns:a="http://schemas.openxmlformats.org/drawingml/2006/main" xmlns:p="http://schemas.openxmlformats.org/presentationml/2006/main" xmlns:r="http://schemas.openxmlformats.org/officeDocument/2006/relationships">
+  <p:cSld>
+    <p:spTree>
+      <p:nvGrpSpPr>
+        <p:cNvPr id="1" name=""/>
+        <p:cNvGrpSpPr/>
+        <p:nvPr/>
+      </p:nvGrpSpPr>
+      <p:grpSpPr/>
+      <p:sp>
+        <p:nvSpPr>
+          <p:cNvPr id="2" name="TextBox 1"/>
+          <p:cNvSpPr txBox="1"/>
+          <p:nvPr/>
+        </p:nvSpPr>
+        <p:spPr>
+          <a:xfrm>
+            <a:off x="457200" y="274320"/>
+            <a:ext cx="10972800" cy="731520"/>
+          </a:xfrm>
+          <a:prstGeom prst="rect">
+            <a:avLst/>
+          </a:prstGeom>
+          <a:noFill/>
+        </p:spPr>
+        <p:txBody>
+          <a:bodyPr wrap="none">
+            <a:spAutoFit/>
+          </a:bodyPr>
+          <a:lstStyle/>
+          <a:p>
+            <a:r>
+              <a:rPr sz="2400" b="1">
+                <a:solidFill>
+                  <a:srgbClr val="8B0000"/>
+                </a:solidFill>
+              </a:rPr>
+              <a:t>本章概览</a:t>
+            </a:r>
+          </a:p>
+        </p:txBody>
+      </p:sp>
+      <p:sp>
+        <p:nvSpPr>
+          <p:cNvPr id="3" name="TextBox 2"/>
+          <p:cNvSpPr txBox="1"/>
+          <p:nvPr/>
+        </p:nvSpPr>
+        <p:spPr>
+          <a:xfrm>
+            <a:off x="457200" y="1097280"/>
+            <a:ext cx="10972800" cy="5029200"/>
+          </a:xfrm>
+          <a:prstGeom prst="rect">
+            <a:avLst/>
+          </a:prstGeom>
+          <a:noFill/>
+        </p:spPr>
+        <p:txBody>
+          <a:bodyPr wrap="none">
+            <a:spAutoFit/>
+          </a:bodyPr>
+          <a:lstStyle/>
+          <a:p/>
+          <a:p>
+            <a:r>
+              <a:rPr sz="1600">
+                <a:solidFill>
+                  <a:srgbClr val="000000"/>
+                </a:solidFill>
+              </a:rPr>
+              <a:t>本章学习二维数组——矩阵的存储和遍历。方向数组是处理网格问题的关键技巧。</a:t>
             </a:r>
           </a:p>
         </p:txBody>

--- a/textbook/ppt/chapter05_ppt.pptx
+++ b/textbook/ppt/chapter05_ppt.pptx
@@ -13,6 +13,7 @@
     <p:sldId id="261" r:id="rId12"/>
     <p:sldId id="262" r:id="rId13"/>
     <p:sldId id="263" r:id="rId14"/>
+    <p:sldId id="264" r:id="rId15"/>
   </p:sldIdLst>
   <p:sldSz cx="12188952" cy="6858000" type="screen4x3"/>
   <p:notesSz cx="6858000" cy="9144000"/>
@@ -3726,7 +3727,7 @@
                   <a:srgbClr val="000000"/>
                 </a:solidFill>
               </a:rPr>
-              <a:t>本章学习了第5章的核心概念</a:t>
+              <a:t/>
             </a:r>
           </a:p>
           <a:p>
@@ -3736,7 +3737,7 @@
                   <a:srgbClr val="000000"/>
                 </a:solidFill>
               </a:rPr>
-              <a:t>多做练习是掌握算法的关键</a:t>
+              <a:t/>
             </a:r>
           </a:p>
           <a:p>
@@ -3746,7 +3747,7 @@
                   <a:srgbClr val="000000"/>
                 </a:solidFill>
               </a:rPr>
-              <a:t>理解算法思想比死记代码更重要</a:t>
+              <a:t/>
             </a:r>
           </a:p>
           <a:p>
@@ -3756,7 +3757,7 @@
                   <a:srgbClr val="000000"/>
                 </a:solidFill>
               </a:rPr>
-              <a:t>遇到问题先画图、再想算法、最后写代码</a:t>
+              <a:t/>
             </a:r>
           </a:p>
         </p:txBody>
@@ -3842,6 +3843,121 @@
                 </a:solidFill>
               </a:rPr>
               <a:t>本章学习二维数组——矩阵的存储和遍历。方向数组是处理网格问题的关键技巧。</a:t>
+            </a:r>
+          </a:p>
+        </p:txBody>
+      </p:sp>
+    </p:spTree>
+  </p:cSld>
+  <p:clrMapOvr>
+    <a:masterClrMapping/>
+  </p:clrMapOvr>
+</p:sld>
+</file>
+
+<file path=ppt/slides/slide9.xml><?xml version="1.0" encoding="utf-8"?>
+<p:sld xmlns:a="http://schemas.openxmlformats.org/drawingml/2006/main" xmlns:p="http://schemas.openxmlformats.org/presentationml/2006/main" xmlns:r="http://schemas.openxmlformats.org/officeDocument/2006/relationships">
+  <p:cSld>
+    <p:spTree>
+      <p:nvGrpSpPr>
+        <p:cNvPr id="1" name=""/>
+        <p:cNvGrpSpPr/>
+        <p:nvPr/>
+      </p:nvGrpSpPr>
+      <p:grpSpPr/>
+      <p:sp>
+        <p:nvSpPr>
+          <p:cNvPr id="2" name="TextBox 1"/>
+          <p:cNvSpPr txBox="1"/>
+          <p:nvPr/>
+        </p:nvSpPr>
+        <p:spPr>
+          <a:xfrm>
+            <a:off x="457200" y="274320"/>
+            <a:ext cx="10972800" cy="731520"/>
+          </a:xfrm>
+          <a:prstGeom prst="rect">
+            <a:avLst/>
+          </a:prstGeom>
+          <a:noFill/>
+        </p:spPr>
+        <p:txBody>
+          <a:bodyPr wrap="none">
+            <a:spAutoFit/>
+          </a:bodyPr>
+          <a:lstStyle/>
+          <a:p>
+            <a:r>
+              <a:rPr sz="2400" b="1">
+                <a:solidFill>
+                  <a:srgbClr val="8B0000"/>
+                </a:solidFill>
+              </a:rPr>
+              <a:t>第5章 核心要点</a:t>
+            </a:r>
+          </a:p>
+        </p:txBody>
+      </p:sp>
+      <p:sp>
+        <p:nvSpPr>
+          <p:cNvPr id="3" name="TextBox 2"/>
+          <p:cNvSpPr txBox="1"/>
+          <p:nvPr/>
+        </p:nvSpPr>
+        <p:spPr>
+          <a:xfrm>
+            <a:off x="457200" y="1097280"/>
+            <a:ext cx="10972800" cy="5029200"/>
+          </a:xfrm>
+          <a:prstGeom prst="rect">
+            <a:avLst/>
+          </a:prstGeom>
+          <a:noFill/>
+        </p:spPr>
+        <p:txBody>
+          <a:bodyPr wrap="none">
+            <a:spAutoFit/>
+          </a:bodyPr>
+          <a:lstStyle/>
+          <a:p/>
+          <a:p>
+            <a:r>
+              <a:rPr sz="1600">
+                <a:solidFill>
+                  <a:srgbClr val="000000"/>
+                </a:solidFill>
+              </a:rPr>
+              <a:t>• 二维数组的声明和遍历</a:t>
+            </a:r>
+          </a:p>
+          <a:p>
+            <a:r>
+              <a:rPr sz="1600">
+                <a:solidFill>
+                  <a:srgbClr val="000000"/>
+                </a:solidFill>
+              </a:rPr>
+              <a:t>• 方向数组处理上下左右移动</a:t>
+            </a:r>
+          </a:p>
+          <a:p>
+            <a:r>
+              <a:rPr sz="1600">
+                <a:solidFill>
+                  <a:srgbClr val="000000"/>
+                </a:solidFill>
+              </a:rPr>
+              <a:t>• 矩阵转置和对角线操作</a:t>
+            </a:r>
+          </a:p>
+          <a:p>
+            <a:r>
+              <a:rPr sz="1600">
+                <a:solidFill>
+                  <a:srgbClr val="000000"/>
+                </a:solidFill>
+              </a:rPr>
+              <a:t>• 蛇形矩阵的模拟技巧</a:t>
             </a:r>
           </a:p>
         </p:txBody>
